--- a/docs/presentation.pptx
+++ b/docs/presentation.pptx
@@ -6537,7 +6537,7 @@
                 </a:solidFill>
                 <a:latin typeface="Calibri"/>
               </a:rPr>
-              <a:t>docs/USER_GUIDE.md — operators</a:t>
+              <a:t>Markdown files in the docs folder next to the source</a:t>
             </a:r>
           </a:p>
         </p:txBody>
@@ -6622,7 +6622,7 @@
                 </a:solidFill>
                 <a:latin typeface="Calibri"/>
               </a:rPr>
-              <a:t>docs/DEV_GUIDE.md — overview</a:t>
+              <a:t>USER_GUIDE.md — operators</a:t>
             </a:r>
           </a:p>
         </p:txBody>
@@ -6707,7 +6707,7 @@
                 </a:solidFill>
                 <a:latin typeface="Calibri"/>
               </a:rPr>
-              <a:t>docs/DEV_GUIDE_LAYOUT.md — deep technical map</a:t>
+              <a:t>DEV_GUIDE.md — overview · DEV_GUIDE_LAYOUT.md — module map</a:t>
             </a:r>
           </a:p>
         </p:txBody>
